--- a/docs/02-deliverables/INF1430_TN3_Melissa_Moya.pptx
+++ b/docs/02-deliverables/INF1430_TN3_Melissa_Moya.pptx
@@ -40767,7 +40767,7 @@
         <p:spPr>
           <a:xfrm>
             <a:off x="475489" y="4519803"/>
-            <a:ext cx="8321040" cy="219291"/>
+            <a:ext cx="8321040" cy="223138"/>
           </a:xfrm>
           <a:prstGeom prst="rect">
             <a:avLst/>
@@ -40782,16 +40782,22 @@
           <a:p>
             <a:pPr algn="ctr"/>
             <a:r>
-              <a:rPr lang="fr-FR" sz="825" b="0" i="1" dirty="0">
-                <a:solidFill>
-                  <a:srgbClr val="8C8C8C"/>
-                </a:solidFill>
-                <a:effectLst/>
-                <a:latin typeface="Consolas" panose="020B0609020204030204" pitchFamily="49" charset="0"/>
-              </a:rPr>
-              <a:t>Validation statistique complémentaire: IC95 et gates appliqués après le benchmark (CI).</a:t>
-            </a:r>
-            <a:endParaRPr lang="en-CA" i="1" dirty="0"/>
+              <a:rPr lang="fr-FR" sz="850" i="1" dirty="0">
+                <a:solidFill>
+                  <a:srgbClr val="C0C0C0"/>
+                </a:solidFill>
+                <a:latin typeface="Calibri" pitchFamily="34" charset="0"/>
+                <a:cs typeface="Calibri" pitchFamily="34" charset="-120"/>
+              </a:rPr>
+              <a:t>Validation statistique complémentaire: IC95 et gates appliqués après le benchmark (CI)</a:t>
+            </a:r>
+            <a:endParaRPr lang="en-CA" sz="850" i="1" dirty="0">
+              <a:solidFill>
+                <a:srgbClr val="C0C0C0"/>
+              </a:solidFill>
+              <a:latin typeface="Calibri" pitchFamily="34" charset="0"/>
+              <a:cs typeface="Calibri" pitchFamily="34" charset="-120"/>
+            </a:endParaRPr>
           </a:p>
         </p:txBody>
       </p:sp>
@@ -41614,7 +41620,29 @@
                 <a:ea typeface="Calibri" pitchFamily="34" charset="-122"/>
                 <a:cs typeface="Calibri" pitchFamily="34" charset="-120"/>
               </a:rPr>
-              <a:t>Bundle généré et vérifié</a:t>
+              <a:t>Dossier de </a:t>
+            </a:r>
+            <a:r>
+              <a:rPr lang="en-US" sz="1000" b="1" dirty="0" err="1">
+                <a:solidFill>
+                  <a:srgbClr val="0A0A0A"/>
+                </a:solidFill>
+                <a:latin typeface="Calibri" pitchFamily="34" charset="0"/>
+                <a:ea typeface="Calibri" pitchFamily="34" charset="-122"/>
+                <a:cs typeface="Calibri" pitchFamily="34" charset="-120"/>
+              </a:rPr>
+              <a:t>preuves</a:t>
+            </a:r>
+            <a:r>
+              <a:rPr lang="en-US" sz="1000" b="1" dirty="0">
+                <a:solidFill>
+                  <a:srgbClr val="0A0A0A"/>
+                </a:solidFill>
+                <a:latin typeface="Calibri" pitchFamily="34" charset="0"/>
+                <a:ea typeface="Calibri" pitchFamily="34" charset="-122"/>
+                <a:cs typeface="Calibri" pitchFamily="34" charset="-120"/>
+              </a:rPr>
+              <a:t> généré et vérifié</a:t>
             </a:r>
             <a:endParaRPr lang="en-US" sz="1000" dirty="0"/>
           </a:p>
@@ -41824,8 +41852,8 @@
         </p:nvSpPr>
         <p:spPr>
           <a:xfrm>
-            <a:off x="475488" y="3822192"/>
-            <a:ext cx="8321040" cy="438912"/>
+            <a:off x="475488" y="3848848"/>
+            <a:ext cx="7863840" cy="438912"/>
           </a:xfrm>
           <a:prstGeom prst="roundRect">
             <a:avLst>
@@ -41852,72 +41880,39 @@
       </p:sp>
       <p:sp>
         <p:nvSpPr>
-          <p:cNvPr id="39" name="Shape 37"/>
-          <p:cNvSpPr/>
-          <p:nvPr/>
-        </p:nvSpPr>
-        <p:spPr>
-          <a:xfrm>
-            <a:off x="475488" y="3822192"/>
-            <a:ext cx="54864" cy="438912"/>
-          </a:xfrm>
-          <a:prstGeom prst="rect">
-            <a:avLst/>
-          </a:prstGeom>
-          <a:solidFill>
-            <a:srgbClr val="0A0A0A"/>
-          </a:solidFill>
-          <a:ln w="12700">
-            <a:solidFill>
-              <a:srgbClr val="0A0A0A"/>
-            </a:solidFill>
-            <a:prstDash val="solid"/>
+          <p:cNvPr id="40" name="Text 38"/>
+          <p:cNvSpPr/>
+          <p:nvPr/>
+        </p:nvSpPr>
+        <p:spPr>
+          <a:xfrm>
+            <a:off x="1057072" y="3845993"/>
+            <a:ext cx="6945549" cy="438912"/>
+          </a:xfrm>
+          <a:prstGeom prst="rect">
+            <a:avLst/>
+          </a:prstGeom>
+          <a:noFill/>
+          <a:ln>
+            <a:noFill/>
           </a:ln>
         </p:spPr>
         <p:txBody>
-          <a:bodyPr/>
-          <a:lstStyle/>
-          <a:p>
-            <a:endParaRPr lang="en-CA"/>
-          </a:p>
-        </p:txBody>
-      </p:sp>
-      <p:sp>
-        <p:nvSpPr>
-          <p:cNvPr id="40" name="Text 38"/>
-          <p:cNvSpPr/>
-          <p:nvPr/>
-        </p:nvSpPr>
-        <p:spPr>
-          <a:xfrm>
-            <a:off x="640080" y="3822192"/>
-            <a:ext cx="8046720" cy="438912"/>
-          </a:xfrm>
-          <a:prstGeom prst="rect">
-            <a:avLst/>
-          </a:prstGeom>
-          <a:noFill/>
-          <a:ln/>
-        </p:spPr>
-        <p:txBody>
-          <a:bodyPr wrap="square" lIns="0" tIns="0" rIns="0" bIns="0" rtlCol="0" anchor="ctr"/>
-          <a:lstStyle/>
-          <a:p>
-            <a:pPr marL="0" indent="0">
-              <a:buNone/>
-            </a:pPr>
-            <a:r>
-              <a:rPr lang="fr-FR" sz="1000" b="1" dirty="0">
-                <a:solidFill>
-                  <a:srgbClr val="0A0A0A"/>
-                </a:solidFill>
-                <a:latin typeface="Calibri" pitchFamily="34" charset="0"/>
-                <a:ea typeface="Calibri" pitchFamily="34" charset="-122"/>
-                <a:cs typeface="Calibri" pitchFamily="34" charset="-120"/>
-              </a:rPr>
-              <a:t>Les résultats sont maintenant traçables et reproductibles, avec une preuve liée au commit soumis.</a:t>
-            </a:r>
-            <a:endParaRPr lang="en-US" sz="1000" dirty="0"/>
+          <a:bodyPr wrap="square" lIns="0" tIns="0" rIns="0" bIns="0" rtlCol="0" anchor="ctr"/>
+          <a:lstStyle/>
+          <a:p>
+            <a:pPr marL="0" indent="0" algn="ctr">
+              <a:buNone/>
+            </a:pPr>
+            <a:r>
+              <a:rPr lang="fr-FR" sz="1000" i="1" dirty="0">
+                <a:latin typeface="Calibri" pitchFamily="34" charset="0"/>
+                <a:ea typeface="Calibri" pitchFamily="34" charset="-122"/>
+                <a:cs typeface="Calibri" pitchFamily="34" charset="-120"/>
+              </a:rPr>
+              <a:t>Planification avancée — TN4 : Les fichiers de référence Twofish (ECB_VK/VT/TBL) sont protégés par des fichiers .sha256 et le CI vérifie l'intégrité des données de test avant chaque exécution KAT.</a:t>
+            </a:r>
+            <a:endParaRPr lang="en-US" sz="1000" i="1" dirty="0"/>
           </a:p>
         </p:txBody>
       </p:sp>
@@ -42037,6 +42032,124 @@
               </a:rPr>
               <a:t> sans échec (102 tests), KAT entièrement validé (60 assertions PASS) et audit IC95 validé (G1, G2, G3).</a:t>
             </a:r>
+          </a:p>
+        </p:txBody>
+      </p:sp>
+      <p:sp>
+        <p:nvSpPr>
+          <p:cNvPr id="30" name="Text 38">
+            <a:extLst>
+              <a:ext uri="{FF2B5EF4-FFF2-40B4-BE49-F238E27FC236}">
+                <a16:creationId xmlns:a16="http://schemas.microsoft.com/office/drawing/2014/main" id="{BE2FF194-3DA6-E0FE-E207-24F7199490E4}"/>
+              </a:ext>
+            </a:extLst>
+          </p:cNvPr>
+          <p:cNvSpPr/>
+          <p:nvPr/>
+        </p:nvSpPr>
+        <p:spPr>
+          <a:xfrm>
+            <a:off x="521208" y="4476734"/>
+            <a:ext cx="7863840" cy="310897"/>
+          </a:xfrm>
+          <a:prstGeom prst="rect">
+            <a:avLst/>
+          </a:prstGeom>
+          <a:noFill/>
+          <a:ln/>
+        </p:spPr>
+        <p:txBody>
+          <a:bodyPr wrap="square" lIns="0" tIns="0" rIns="0" bIns="0" rtlCol="0" anchor="ctr"/>
+          <a:lstStyle/>
+          <a:p>
+            <a:pPr marL="0" indent="0" algn="ctr">
+              <a:buNone/>
+            </a:pPr>
+            <a:r>
+              <a:rPr lang="fr-FR" sz="850" i="1" dirty="0">
+                <a:solidFill>
+                  <a:srgbClr val="C0C0C0"/>
+                </a:solidFill>
+                <a:latin typeface="Calibri" pitchFamily="34" charset="0"/>
+                <a:cs typeface="Calibri" pitchFamily="34" charset="-120"/>
+              </a:rPr>
+              <a:t>Les résultats sont maintenant traçables et reproductibles, avec une preuve liée au commit soumis</a:t>
+            </a:r>
+            <a:endParaRPr lang="en-US" sz="850" i="1" dirty="0">
+              <a:solidFill>
+                <a:srgbClr val="C0C0C0"/>
+              </a:solidFill>
+              <a:latin typeface="Calibri" pitchFamily="34" charset="0"/>
+              <a:cs typeface="Calibri" pitchFamily="34" charset="-120"/>
+            </a:endParaRPr>
+          </a:p>
+        </p:txBody>
+      </p:sp>
+      <p:pic>
+        <p:nvPicPr>
+          <p:cNvPr id="32" name="Picture 31">
+            <a:extLst>
+              <a:ext uri="{FF2B5EF4-FFF2-40B4-BE49-F238E27FC236}">
+                <a16:creationId xmlns:a16="http://schemas.microsoft.com/office/drawing/2014/main" id="{5C7843B4-89E9-4D4C-0C1D-CF0E26B8C8A1}"/>
+              </a:ext>
+            </a:extLst>
+          </p:cNvPr>
+          <p:cNvPicPr>
+            <a:picLocks noChangeAspect="1"/>
+          </p:cNvPicPr>
+          <p:nvPr/>
+        </p:nvPicPr>
+        <p:blipFill>
+          <a:blip r:embed="rId3"/>
+          <a:stretch>
+            <a:fillRect/>
+          </a:stretch>
+        </p:blipFill>
+        <p:spPr>
+          <a:xfrm>
+            <a:off x="539496" y="3882375"/>
+            <a:ext cx="396240" cy="396240"/>
+          </a:xfrm>
+          <a:prstGeom prst="rect">
+            <a:avLst/>
+          </a:prstGeom>
+        </p:spPr>
+      </p:pic>
+      <p:sp>
+        <p:nvSpPr>
+          <p:cNvPr id="34" name="Shape 24">
+            <a:extLst>
+              <a:ext uri="{FF2B5EF4-FFF2-40B4-BE49-F238E27FC236}">
+                <a16:creationId xmlns:a16="http://schemas.microsoft.com/office/drawing/2014/main" id="{CAAEC96B-6873-A3FE-7561-50E2FA9B6D8A}"/>
+              </a:ext>
+            </a:extLst>
+          </p:cNvPr>
+          <p:cNvSpPr/>
+          <p:nvPr/>
+        </p:nvSpPr>
+        <p:spPr>
+          <a:xfrm>
+            <a:off x="475488" y="3807992"/>
+            <a:ext cx="7863840" cy="45720"/>
+          </a:xfrm>
+          <a:prstGeom prst="rect">
+            <a:avLst/>
+          </a:prstGeom>
+          <a:solidFill>
+            <a:srgbClr val="888888"/>
+          </a:solidFill>
+          <a:ln w="12700">
+            <a:solidFill>
+              <a:srgbClr val="888888"/>
+            </a:solidFill>
+            <a:prstDash val="solid"/>
+          </a:ln>
+        </p:spPr>
+        <p:txBody>
+          <a:bodyPr/>
+          <a:lstStyle/>
+          <a:p>
+            <a:endParaRPr lang="en-CA"/>
           </a:p>
         </p:txBody>
       </p:sp>
@@ -46456,7 +46569,18 @@
                 <a:ea typeface="Calibri" pitchFamily="34" charset="-122"/>
                 <a:cs typeface="Calibri" pitchFamily="34" charset="-120"/>
               </a:rPr>
-              <a:t>PyCryptodome + twofish</a:t>
+              <a:t>PyCryptodome + </a:t>
+            </a:r>
+            <a:r>
+              <a:rPr lang="fr-FR" sz="950" b="1" dirty="0" err="1">
+                <a:solidFill>
+                  <a:srgbClr val="C9A84C"/>
+                </a:solidFill>
+                <a:latin typeface="Calibri" pitchFamily="34" charset="0"/>
+                <a:ea typeface="Calibri" pitchFamily="34" charset="-122"/>
+                <a:cs typeface="Calibri" pitchFamily="34" charset="-120"/>
+              </a:rPr>
+              <a:t>twofish</a:t>
             </a:r>
             <a:endParaRPr lang="en-US" sz="950" dirty="0"/>
           </a:p>
@@ -46516,6 +46640,17 @@
               <a:buNone/>
             </a:pPr>
             <a:r>
+              <a:rPr lang="fr-FR" sz="800" dirty="0" err="1">
+                <a:solidFill>
+                  <a:srgbClr val="B8942A"/>
+                </a:solidFill>
+                <a:latin typeface="Calibri" pitchFamily="34" charset="0"/>
+                <a:ea typeface="Calibri" pitchFamily="34" charset="-122"/>
+                <a:cs typeface="Calibri" pitchFamily="34" charset="-120"/>
+              </a:rPr>
+              <a:t>twofish</a:t>
+            </a:r>
+            <a:r>
               <a:rPr lang="fr-FR" sz="800" dirty="0">
                 <a:solidFill>
                   <a:srgbClr val="B8942A"/>
@@ -46524,7 +46659,7 @@
                 <a:ea typeface="Calibri" pitchFamily="34" charset="-122"/>
                 <a:cs typeface="Calibri" pitchFamily="34" charset="-120"/>
               </a:rPr>
-              <a:t>twofish pour Twofish</a:t>
+              <a:t> pour Twofish</a:t>
             </a:r>
           </a:p>
           <a:p>
